--- a/builder/assets/reference-pages/hr-service-catalog.pptx
+++ b/builder/assets/reference-pages/hr-service-catalog.pptx
@@ -1097,7 +1097,7 @@
                   <a:srgbClr val="15375F"/>
                 </a:solidFill>
               </a:rPr>
-              <a:t>字段完整率 83%、无效工单率 7%，服务目录距 90% 与 5% 目标仍有差距</a:t>
+              <a:t>Field completeness rate 83%, invalid work order rate 7%, the service directory is 90% with 5% There is still a gap between the goals</a:t>
             </a:r>
           </a:p>
         </p:txBody>
@@ -1151,7 +1151,7 @@
                   <a:srgbClr val="E8872D"/>
                 </a:solidFill>
               </a:rPr>
-              <a:t>字段完整率</a:t>
+              <a:t>Field completeness rate</a:t>
             </a:r>
           </a:p>
           <a:p xmlns:a="http://schemas.openxmlformats.org/drawingml/2006/main">
@@ -1185,7 +1185,7 @@
                   <a:srgbClr val="E8872D"/>
                 </a:solidFill>
               </a:rPr>
-              <a:t>目标 90%</a:t>
+              <a:t>target 90%</a:t>
             </a:r>
           </a:p>
         </p:txBody>
@@ -1239,7 +1239,7 @@
                   <a:srgbClr val="15375F"/>
                 </a:solidFill>
               </a:rPr>
-              <a:t>无效工单率</a:t>
+              <a:t>Invalid work order rate</a:t>
             </a:r>
           </a:p>
           <a:p xmlns:a="http://schemas.openxmlformats.org/drawingml/2006/main">
@@ -1273,7 +1273,7 @@
                   <a:srgbClr val="15375F"/>
                 </a:solidFill>
               </a:rPr>
-              <a:t>目标 &lt;5%</a:t>
+              <a:t>target &lt;5%</a:t>
             </a:r>
           </a:p>
         </p:txBody>
@@ -1327,7 +1327,7 @@
                   <a:srgbClr val="15375F"/>
                 </a:solidFill>
               </a:rPr>
-              <a:t>有效工单率</a:t>
+              <a:t>Effective work order rate</a:t>
             </a:r>
           </a:p>
           <a:p xmlns:a="http://schemas.openxmlformats.org/drawingml/2006/main">
@@ -1361,7 +1361,7 @@
                   <a:srgbClr val="15375F"/>
                 </a:solidFill>
               </a:rPr>
-              <a:t>目标 95%</a:t>
+              <a:t>target 95%</a:t>
             </a:r>
           </a:p>
         </p:txBody>
@@ -1446,7 +1446,7 @@
                   <a:srgbClr val="15375F"/>
                 </a:solidFill>
               </a:rPr>
-              <a:t>服务目录｜需求量｜办理成功率｜自动化覆盖｜责任组</a:t>
+              <a:t>Service catalog｜demand｜Success rate｜Automated coverage｜Responsible group</a:t>
             </a:r>
           </a:p>
         </p:txBody>
@@ -1496,7 +1496,7 @@
                   <a:srgbClr val="15375F"/>
                 </a:solidFill>
               </a:rPr>
-              <a:t>薪资证明</a:t>
+              <a:t>Salary certificate</a:t>
             </a:r>
           </a:p>
         </p:txBody>
@@ -1704,7 +1704,7 @@
                   <a:srgbClr val="172033"/>
                 </a:solidFill>
               </a:rPr>
-              <a:t>薪酬组</a:t>
+              <a:t>Pay group</a:t>
             </a:r>
           </a:p>
         </p:txBody>
@@ -1754,7 +1754,7 @@
                   <a:srgbClr val="15375F"/>
                 </a:solidFill>
               </a:rPr>
-              <a:t>假期资格</a:t>
+              <a:t>Holiday eligibility</a:t>
             </a:r>
           </a:p>
         </p:txBody>
@@ -1962,7 +1962,7 @@
                   <a:srgbClr val="172033"/>
                 </a:solidFill>
               </a:rPr>
-              <a:t>员工服务</a:t>
+              <a:t>Staff service</a:t>
             </a:r>
           </a:p>
         </p:txBody>
@@ -2012,7 +2012,7 @@
                   <a:srgbClr val="15375F"/>
                 </a:solidFill>
               </a:rPr>
-              <a:t>异地政策</a:t>
+              <a:t>Off-site policy</a:t>
             </a:r>
           </a:p>
         </p:txBody>
@@ -2220,7 +2220,7 @@
                   <a:srgbClr val="172033"/>
                 </a:solidFill>
               </a:rPr>
-              <a:t>政策组</a:t>
+              <a:t>policy group</a:t>
             </a:r>
           </a:p>
         </p:txBody>
@@ -2270,7 +2270,7 @@
                   <a:srgbClr val="15375F"/>
                 </a:solidFill>
               </a:rPr>
-              <a:t>福利变更</a:t>
+              <a:t>Benefit changes</a:t>
             </a:r>
           </a:p>
         </p:txBody>
@@ -2478,7 +2478,7 @@
                   <a:srgbClr val="172033"/>
                 </a:solidFill>
               </a:rPr>
-              <a:t>福利组</a:t>
+              <a:t>Welfare group</a:t>
             </a:r>
           </a:p>
         </p:txBody>
@@ -2528,7 +2528,7 @@
                   <a:srgbClr val="15375F"/>
                 </a:solidFill>
               </a:rPr>
-              <a:t>培训报名</a:t>
+              <a:t>Training registration</a:t>
             </a:r>
           </a:p>
         </p:txBody>
@@ -2774,14 +2774,14 @@
                   <a:srgbClr val="172033"/>
                 </a:solidFill>
               </a:rPr>
-              <a:t>学习组</a:t>
-            </a:r>
-          </a:p>
-        </p:txBody>
-      </p:sp>
-      <p:sp>
-        <p:nvSpPr>
-          <p:cNvPr id="33" name="发现／根因／动作-rail">
+              <a:t>study group</a:t>
+            </a:r>
+          </a:p>
+        </p:txBody>
+      </p:sp>
+      <p:sp>
+        <p:nvSpPr>
+          <p:cNvPr id="33" name="discover／root cause／action-rail">
             <a:extLst xmlns:a="http://schemas.openxmlformats.org/drawingml/2006/main">
               <a:ext uri="{FF2B5EF4-FFF2-40B4-BE49-F238E27FC236}">
                 <a16:creationId xmlns:a16="http://schemas.microsoft.com/office/drawing/2014/main" id="{E3AE46FE-58B8-429F-B42C-56474E6D0010}"/>
@@ -2816,7 +2816,7 @@
       </p:sp>
       <p:sp>
         <p:nvSpPr>
-          <p:cNvPr id="34" name="发现／根因／动作-title">
+          <p:cNvPr id="34" name="discover／root cause／action-title">
             <a:extLst xmlns:a="http://schemas.openxmlformats.org/drawingml/2006/main">
               <a:ext uri="{FF2B5EF4-FFF2-40B4-BE49-F238E27FC236}">
                 <a16:creationId xmlns:a16="http://schemas.microsoft.com/office/drawing/2014/main" id="{6C9B0465-E283-497D-8205-0877159E4EDD}"/>
@@ -2859,14 +2859,14 @@
                   <a:srgbClr val="15375F"/>
                 </a:solidFill>
               </a:rPr>
-              <a:t>发现／根因／动作</a:t>
-            </a:r>
-          </a:p>
-        </p:txBody>
-      </p:sp>
-      <p:sp>
-        <p:nvSpPr>
-          <p:cNvPr id="35" name="发现／根因／动作-1">
+              <a:t>discover／root cause／action</a:t>
+            </a:r>
+          </a:p>
+        </p:txBody>
+      </p:sp>
+      <p:sp>
+        <p:nvSpPr>
+          <p:cNvPr id="35" name="discover／root cause／action-1">
             <a:extLst xmlns:a="http://schemas.openxmlformats.org/drawingml/2006/main">
               <a:ext uri="{FF2B5EF4-FFF2-40B4-BE49-F238E27FC236}">
                 <a16:creationId xmlns:a16="http://schemas.microsoft.com/office/drawing/2014/main" id="{34634D12-F2D6-422C-AE71-B45765028CD1}"/>
@@ -2915,14 +2915,14 @@
                   <a:srgbClr val="172033"/>
                 </a:solidFill>
               </a:rPr>
-              <a:t>1  发起与字段受理是最大损失环节</a:t>
-            </a:r>
-          </a:p>
-        </p:txBody>
-      </p:sp>
-      <p:sp>
-        <p:nvSpPr>
-          <p:cNvPr id="36" name="发现／根因／动作-2">
+              <a:t>1  Initiation and field acceptance are the biggest losses.</a:t>
+            </a:r>
+          </a:p>
+        </p:txBody>
+      </p:sp>
+      <p:sp>
+        <p:nvSpPr>
+          <p:cNvPr id="36" name="discover／root cause／action-2">
             <a:extLst xmlns:a="http://schemas.openxmlformats.org/drawingml/2006/main">
               <a:ext uri="{FF2B5EF4-FFF2-40B4-BE49-F238E27FC236}">
                 <a16:creationId xmlns:a16="http://schemas.microsoft.com/office/drawing/2014/main" id="{98E64B9F-2EA6-4157-AE6D-D8A794942CAD}"/>
@@ -2971,14 +2971,14 @@
                   <a:srgbClr val="172033"/>
                 </a:solidFill>
               </a:rPr>
-              <a:t>2  异地政策成功率和自动化率最低</a:t>
-            </a:r>
-          </a:p>
-        </p:txBody>
-      </p:sp>
-      <p:sp>
-        <p:nvSpPr>
-          <p:cNvPr id="37" name="发现／根因／动作-3">
+              <a:t>2  Off-site policy has the lowest success rate and automation rate</a:t>
+            </a:r>
+          </a:p>
+        </p:txBody>
+      </p:sp>
+      <p:sp>
+        <p:nvSpPr>
+          <p:cNvPr id="37" name="discover／root cause／action-3">
             <a:extLst xmlns:a="http://schemas.openxmlformats.org/drawingml/2006/main">
               <a:ext uri="{FF2B5EF4-FFF2-40B4-BE49-F238E27FC236}">
                 <a16:creationId xmlns:a16="http://schemas.microsoft.com/office/drawing/2014/main" id="{38D0BB89-B19D-4C51-ACC4-4408C066E0D5}"/>
@@ -3027,7 +3027,7 @@
                   <a:srgbClr val="172033"/>
                 </a:solidFill>
               </a:rPr>
-              <a:t>3  先改目录字段，再扩自动化覆盖</a:t>
+              <a:t>3  Change directory fields first, then expand automation coverage</a:t>
             </a:r>
           </a:p>
         </p:txBody>
@@ -3083,7 +3083,7 @@
                   <a:srgbClr val="15375F"/>
                 </a:solidFill>
               </a:rPr>
-              <a:t>每万次发起减少 700 件无效工单，目标字段完整率达到 90%</a:t>
+              <a:t>Reduction per 10,000 launches 700 invalid work orders, and the target field completeness rate reaches 90%</a:t>
             </a:r>
           </a:p>
         </p:txBody>
